--- a/GlamMatch_Full_Project_Presentation.pptx
+++ b/GlamMatch_Full_Project_Presentation.pptx
@@ -1584,14 +1584,6 @@
             <a:pPr marL="0" indent="0" algn="ctr">
               <a:buNone/>
             </a:pPr>
-            <a:r>
-              <a:rPr lang="en-US" sz="6000" dirty="0">
-                <a:solidFill>
-                  <a:srgbClr val="000000"/>
-                </a:solidFill>
-              </a:rPr>
-              <a:t>💄</a:t>
-            </a:r>
             <a:endParaRPr lang="en-US" sz="6000" dirty="0"/>
           </a:p>
         </p:txBody>
@@ -1604,8 +1596,8 @@
         </p:nvSpPr>
         <p:spPr>
           <a:xfrm>
-            <a:off x="137160" y="1645920"/>
-            <a:ext cx="2926080" cy="777240"/>
+            <a:off x="137160" y="1219200"/>
+            <a:ext cx="2926080" cy="1066800"/>
           </a:xfrm>
           <a:prstGeom prst="rect">
             <a:avLst/>
@@ -1643,8 +1635,8 @@
         </p:nvSpPr>
         <p:spPr>
           <a:xfrm>
-            <a:off x="137160" y="2377440"/>
-            <a:ext cx="2926080" cy="822960"/>
+            <a:off x="137160" y="2083930"/>
+            <a:ext cx="2926080" cy="975359"/>
           </a:xfrm>
           <a:prstGeom prst="rect">
             <a:avLst/>
@@ -2345,7 +2337,7 @@
         </p:nvSpPr>
         <p:spPr>
           <a:xfrm>
-            <a:off x="274320" y="804672"/>
+            <a:off x="274320" y="839047"/>
             <a:ext cx="4251960" cy="960120"/>
           </a:xfrm>
           <a:prstGeom prst="rect">
@@ -2391,12 +2383,17 @@
             <a:r>
               <a:rPr lang="en-US" sz="2200" dirty="0">
                 <a:solidFill>
-                  <a:srgbClr val="000000"/>
-                </a:solidFill>
-              </a:rPr>
-              <a:t>🔄</a:t>
-            </a:r>
-            <a:endParaRPr lang="en-US" sz="2200" dirty="0"/>
+                  <a:schemeClr val="bg2"/>
+                </a:solidFill>
+                <a:sym typeface="Wingdings" panose="05000000000000000000" pitchFamily="2" charset="2"/>
+              </a:rPr>
+              <a:t></a:t>
+            </a:r>
+            <a:endParaRPr lang="en-US" sz="2200" dirty="0">
+              <a:solidFill>
+                <a:schemeClr val="bg2"/>
+              </a:solidFill>
+            </a:endParaRPr>
           </a:p>
         </p:txBody>
       </p:sp>
@@ -2526,17 +2523,35 @@
           <a:bodyPr wrap="square" rtlCol="0" anchor="ctr"/>
           <a:lstStyle/>
           <a:p>
+            <a:pPr algn="ctr"/>
+            <a:endParaRPr lang="en-US" sz="2200" dirty="0">
+              <a:solidFill>
+                <a:schemeClr val="bg2"/>
+              </a:solidFill>
+              <a:sym typeface="Wingdings" panose="05000000000000000000" pitchFamily="2" charset="2"/>
+            </a:endParaRPr>
+          </a:p>
+          <a:p>
+            <a:pPr algn="ctr"/>
+            <a:r>
+              <a:rPr lang="en-US" sz="2200" dirty="0">
+                <a:solidFill>
+                  <a:schemeClr val="bg2"/>
+                </a:solidFill>
+                <a:sym typeface="Wingdings" panose="05000000000000000000" pitchFamily="2" charset="2"/>
+              </a:rPr>
+              <a:t></a:t>
+            </a:r>
+            <a:endParaRPr lang="en-US" sz="2200" dirty="0">
+              <a:solidFill>
+                <a:schemeClr val="bg2"/>
+              </a:solidFill>
+            </a:endParaRPr>
+          </a:p>
+          <a:p>
             <a:pPr marL="0" indent="0" algn="ctr">
               <a:buNone/>
             </a:pPr>
-            <a:r>
-              <a:rPr lang="en-US" sz="2200" dirty="0">
-                <a:solidFill>
-                  <a:srgbClr val="000000"/>
-                </a:solidFill>
-              </a:rPr>
-              <a:t>📋</a:t>
-            </a:r>
             <a:endParaRPr lang="en-US" sz="2200" dirty="0"/>
           </a:p>
         </p:txBody>
@@ -2667,17 +2682,35 @@
           <a:bodyPr wrap="square" rtlCol="0" anchor="ctr"/>
           <a:lstStyle/>
           <a:p>
+            <a:pPr algn="ctr"/>
+            <a:endParaRPr lang="en-US" sz="2200" dirty="0">
+              <a:solidFill>
+                <a:schemeClr val="bg2"/>
+              </a:solidFill>
+              <a:sym typeface="Wingdings" panose="05000000000000000000" pitchFamily="2" charset="2"/>
+            </a:endParaRPr>
+          </a:p>
+          <a:p>
+            <a:pPr algn="ctr"/>
+            <a:r>
+              <a:rPr lang="en-US" sz="2200" dirty="0">
+                <a:solidFill>
+                  <a:schemeClr val="bg2"/>
+                </a:solidFill>
+                <a:sym typeface="Wingdings" panose="05000000000000000000" pitchFamily="2" charset="2"/>
+              </a:rPr>
+              <a:t></a:t>
+            </a:r>
+            <a:endParaRPr lang="en-US" sz="2200" dirty="0">
+              <a:solidFill>
+                <a:schemeClr val="bg2"/>
+              </a:solidFill>
+            </a:endParaRPr>
+          </a:p>
+          <a:p>
             <a:pPr marL="0" indent="0" algn="ctr">
               <a:buNone/>
             </a:pPr>
-            <a:r>
-              <a:rPr lang="en-US" sz="2200" dirty="0">
-                <a:solidFill>
-                  <a:srgbClr val="000000"/>
-                </a:solidFill>
-              </a:rPr>
-              <a:t>🏗️</a:t>
-            </a:r>
             <a:endParaRPr lang="en-US" sz="2200" dirty="0"/>
           </a:p>
         </p:txBody>
@@ -2808,17 +2841,35 @@
           <a:bodyPr wrap="square" rtlCol="0" anchor="ctr"/>
           <a:lstStyle/>
           <a:p>
+            <a:pPr algn="ctr"/>
+            <a:endParaRPr lang="en-US" sz="2200" dirty="0">
+              <a:solidFill>
+                <a:schemeClr val="bg2"/>
+              </a:solidFill>
+              <a:sym typeface="Wingdings" panose="05000000000000000000" pitchFamily="2" charset="2"/>
+            </a:endParaRPr>
+          </a:p>
+          <a:p>
+            <a:pPr algn="ctr"/>
+            <a:r>
+              <a:rPr lang="en-US" sz="2200" dirty="0">
+                <a:solidFill>
+                  <a:schemeClr val="bg2"/>
+                </a:solidFill>
+                <a:sym typeface="Wingdings" panose="05000000000000000000" pitchFamily="2" charset="2"/>
+              </a:rPr>
+              <a:t></a:t>
+            </a:r>
+            <a:endParaRPr lang="en-US" sz="2200" dirty="0">
+              <a:solidFill>
+                <a:schemeClr val="bg2"/>
+              </a:solidFill>
+            </a:endParaRPr>
+          </a:p>
+          <a:p>
             <a:pPr marL="0" indent="0" algn="ctr">
               <a:buNone/>
             </a:pPr>
-            <a:r>
-              <a:rPr lang="en-US" sz="2200" dirty="0">
-                <a:solidFill>
-                  <a:srgbClr val="000000"/>
-                </a:solidFill>
-              </a:rPr>
-              <a:t>🗄️</a:t>
-            </a:r>
             <a:endParaRPr lang="en-US" sz="2200" dirty="0"/>
           </a:p>
         </p:txBody>
@@ -2949,17 +3000,35 @@
           <a:bodyPr wrap="square" rtlCol="0" anchor="ctr"/>
           <a:lstStyle/>
           <a:p>
+            <a:pPr algn="ctr"/>
+            <a:endParaRPr lang="en-US" sz="2200" dirty="0">
+              <a:solidFill>
+                <a:schemeClr val="bg2"/>
+              </a:solidFill>
+              <a:sym typeface="Wingdings" panose="05000000000000000000" pitchFamily="2" charset="2"/>
+            </a:endParaRPr>
+          </a:p>
+          <a:p>
+            <a:pPr algn="ctr"/>
+            <a:r>
+              <a:rPr lang="en-US" sz="2200" dirty="0">
+                <a:solidFill>
+                  <a:schemeClr val="bg2"/>
+                </a:solidFill>
+                <a:sym typeface="Wingdings" panose="05000000000000000000" pitchFamily="2" charset="2"/>
+              </a:rPr>
+              <a:t></a:t>
+            </a:r>
+            <a:endParaRPr lang="en-US" sz="2200" dirty="0">
+              <a:solidFill>
+                <a:schemeClr val="bg2"/>
+              </a:solidFill>
+            </a:endParaRPr>
+          </a:p>
+          <a:p>
             <a:pPr marL="0" indent="0" algn="ctr">
               <a:buNone/>
             </a:pPr>
-            <a:r>
-              <a:rPr lang="en-US" sz="2200" dirty="0">
-                <a:solidFill>
-                  <a:srgbClr val="000000"/>
-                </a:solidFill>
-              </a:rPr>
-              <a:t>🧪</a:t>
-            </a:r>
             <a:endParaRPr lang="en-US" sz="2200" dirty="0"/>
           </a:p>
         </p:txBody>
@@ -3090,17 +3159,35 @@
           <a:bodyPr wrap="square" rtlCol="0" anchor="ctr"/>
           <a:lstStyle/>
           <a:p>
+            <a:pPr algn="ctr"/>
+            <a:endParaRPr lang="en-US" sz="2200" dirty="0">
+              <a:solidFill>
+                <a:schemeClr val="bg2"/>
+              </a:solidFill>
+              <a:sym typeface="Wingdings" panose="05000000000000000000" pitchFamily="2" charset="2"/>
+            </a:endParaRPr>
+          </a:p>
+          <a:p>
+            <a:pPr algn="ctr"/>
+            <a:r>
+              <a:rPr lang="en-US" sz="2200" dirty="0">
+                <a:solidFill>
+                  <a:schemeClr val="bg2"/>
+                </a:solidFill>
+                <a:sym typeface="Wingdings" panose="05000000000000000000" pitchFamily="2" charset="2"/>
+              </a:rPr>
+              <a:t></a:t>
+            </a:r>
+            <a:endParaRPr lang="en-US" sz="2200" dirty="0">
+              <a:solidFill>
+                <a:schemeClr val="bg2"/>
+              </a:solidFill>
+            </a:endParaRPr>
+          </a:p>
+          <a:p>
             <a:pPr marL="0" indent="0" algn="ctr">
               <a:buNone/>
             </a:pPr>
-            <a:r>
-              <a:rPr lang="en-US" sz="2200" dirty="0">
-                <a:solidFill>
-                  <a:srgbClr val="000000"/>
-                </a:solidFill>
-              </a:rPr>
-              <a:t>🔐</a:t>
-            </a:r>
             <a:endParaRPr lang="en-US" sz="2200" dirty="0"/>
           </a:p>
         </p:txBody>
@@ -3231,17 +3318,35 @@
           <a:bodyPr wrap="square" rtlCol="0" anchor="ctr"/>
           <a:lstStyle/>
           <a:p>
+            <a:pPr algn="ctr"/>
+            <a:endParaRPr lang="en-US" sz="2200" dirty="0">
+              <a:solidFill>
+                <a:schemeClr val="bg2"/>
+              </a:solidFill>
+              <a:sym typeface="Wingdings" panose="05000000000000000000" pitchFamily="2" charset="2"/>
+            </a:endParaRPr>
+          </a:p>
+          <a:p>
+            <a:pPr algn="ctr"/>
+            <a:r>
+              <a:rPr lang="en-US" sz="2200" dirty="0">
+                <a:solidFill>
+                  <a:schemeClr val="bg2"/>
+                </a:solidFill>
+                <a:sym typeface="Wingdings" panose="05000000000000000000" pitchFamily="2" charset="2"/>
+              </a:rPr>
+              <a:t></a:t>
+            </a:r>
+            <a:endParaRPr lang="en-US" sz="2200" dirty="0">
+              <a:solidFill>
+                <a:schemeClr val="bg2"/>
+              </a:solidFill>
+            </a:endParaRPr>
+          </a:p>
+          <a:p>
             <a:pPr marL="0" indent="0" algn="ctr">
               <a:buNone/>
             </a:pPr>
-            <a:r>
-              <a:rPr lang="en-US" sz="2200" dirty="0">
-                <a:solidFill>
-                  <a:srgbClr val="000000"/>
-                </a:solidFill>
-              </a:rPr>
-              <a:t>📌</a:t>
-            </a:r>
             <a:endParaRPr lang="en-US" sz="2200" dirty="0"/>
           </a:p>
         </p:txBody>
@@ -3433,14 +3538,6 @@
             <a:pPr marL="0" indent="0" algn="ctr">
               <a:buNone/>
             </a:pPr>
-            <a:r>
-              <a:rPr lang="en-US" sz="5600" dirty="0">
-                <a:solidFill>
-                  <a:srgbClr val="000000"/>
-                </a:solidFill>
-              </a:rPr>
-              <a:t>💄</a:t>
-            </a:r>
             <a:endParaRPr lang="en-US" sz="5600" dirty="0"/>
           </a:p>
         </p:txBody>
@@ -6999,7 +7096,7 @@
                 <a:ea typeface="Georgia" pitchFamily="34" charset="-122"/>
                 <a:cs typeface="Georgia" pitchFamily="34" charset="-120"/>
               </a:rPr>
-              <a:t>✅  Advantages</a:t>
+              <a:t>  Advantages</a:t>
             </a:r>
             <a:endParaRPr lang="en-US" sz="1600" dirty="0"/>
           </a:p>
@@ -7483,7 +7580,7 @@
                 <a:ea typeface="Georgia" pitchFamily="34" charset="-122"/>
                 <a:cs typeface="Georgia" pitchFamily="34" charset="-120"/>
               </a:rPr>
-              <a:t>⚠️  Constraints</a:t>
+              <a:t>  Constraints</a:t>
             </a:r>
             <a:endParaRPr lang="en-US" sz="1600" dirty="0"/>
           </a:p>
@@ -8229,14 +8326,6 @@
             <a:pPr marL="0" indent="0" algn="ctr">
               <a:buNone/>
             </a:pPr>
-            <a:r>
-              <a:rPr lang="en-US" sz="2800" dirty="0">
-                <a:solidFill>
-                  <a:srgbClr val="000000"/>
-                </a:solidFill>
-              </a:rPr>
-              <a:t>⚡</a:t>
-            </a:r>
             <a:endParaRPr lang="en-US" sz="2800" dirty="0"/>
           </a:p>
         </p:txBody>
@@ -8968,14 +9057,6 @@
             <a:pPr marL="0" indent="0" algn="ctr">
               <a:buNone/>
             </a:pPr>
-            <a:r>
-              <a:rPr lang="en-US" sz="2800" dirty="0">
-                <a:solidFill>
-                  <a:srgbClr val="000000"/>
-                </a:solidFill>
-              </a:rPr>
-              <a:t>🔒</a:t>
-            </a:r>
             <a:endParaRPr lang="en-US" sz="2800" dirty="0"/>
           </a:p>
         </p:txBody>
@@ -9556,7 +9637,7 @@
         </p:nvSpPr>
         <p:spPr>
           <a:xfrm>
-            <a:off x="2377440" y="4471416"/>
+            <a:off x="2388729" y="4471416"/>
             <a:ext cx="6309360" cy="338328"/>
           </a:xfrm>
           <a:prstGeom prst="rect">
@@ -10981,14 +11062,6 @@
             <a:pPr marL="0" indent="0" algn="ctr">
               <a:buNone/>
             </a:pPr>
-            <a:r>
-              <a:rPr lang="en-US" sz="2200" dirty="0">
-                <a:solidFill>
-                  <a:srgbClr val="000000"/>
-                </a:solidFill>
-              </a:rPr>
-              <a:t>🖥️</a:t>
-            </a:r>
             <a:endParaRPr lang="en-US" sz="2200" dirty="0"/>
           </a:p>
         </p:txBody>
@@ -11001,8 +11074,8 @@
         </p:nvSpPr>
         <p:spPr>
           <a:xfrm>
-            <a:off x="274320" y="1847088"/>
-            <a:ext cx="2834640" cy="365760"/>
+            <a:off x="274320" y="1463040"/>
+            <a:ext cx="2834640" cy="749808"/>
           </a:xfrm>
           <a:prstGeom prst="rect">
             <a:avLst/>
@@ -11419,14 +11492,6 @@
             <a:pPr marL="0" indent="0" algn="ctr">
               <a:buNone/>
             </a:pPr>
-            <a:r>
-              <a:rPr lang="en-US" sz="2200" dirty="0">
-                <a:solidFill>
-                  <a:srgbClr val="000000"/>
-                </a:solidFill>
-              </a:rPr>
-              <a:t>⚙️</a:t>
-            </a:r>
             <a:endParaRPr lang="en-US" sz="2200" dirty="0"/>
           </a:p>
         </p:txBody>
@@ -11439,8 +11504,8 @@
         </p:nvSpPr>
         <p:spPr>
           <a:xfrm>
-            <a:off x="3227832" y="1847088"/>
-            <a:ext cx="2834640" cy="365760"/>
+            <a:off x="3227832" y="1508760"/>
+            <a:ext cx="2834640" cy="704088"/>
           </a:xfrm>
           <a:prstGeom prst="rect">
             <a:avLst/>
@@ -11857,14 +11922,6 @@
             <a:pPr marL="0" indent="0" algn="ctr">
               <a:buNone/>
             </a:pPr>
-            <a:r>
-              <a:rPr lang="en-US" sz="2200" dirty="0">
-                <a:solidFill>
-                  <a:srgbClr val="000000"/>
-                </a:solidFill>
-              </a:rPr>
-              <a:t>🗄️</a:t>
-            </a:r>
             <a:endParaRPr lang="en-US" sz="2200" dirty="0"/>
           </a:p>
         </p:txBody>
@@ -11877,8 +11934,8 @@
         </p:nvSpPr>
         <p:spPr>
           <a:xfrm>
-            <a:off x="6181344" y="1847088"/>
-            <a:ext cx="2834640" cy="365760"/>
+            <a:off x="6181344" y="1453896"/>
+            <a:ext cx="2834640" cy="758952"/>
           </a:xfrm>
           <a:prstGeom prst="rect">
             <a:avLst/>
@@ -15404,7 +15461,7 @@
         </p:nvSpPr>
         <p:spPr>
           <a:xfrm>
-            <a:off x="320040" y="777240"/>
+            <a:off x="320040" y="768096"/>
             <a:ext cx="1691640" cy="1325880"/>
           </a:xfrm>
           <a:prstGeom prst="rect">
@@ -15445,14 +15502,6 @@
             <a:pPr marL="0" indent="0" algn="ctr">
               <a:buNone/>
             </a:pPr>
-            <a:r>
-              <a:rPr lang="en-US" sz="2800" dirty="0">
-                <a:solidFill>
-                  <a:srgbClr val="000000"/>
-                </a:solidFill>
-              </a:rPr>
-              <a:t>👩‍💼</a:t>
-            </a:r>
             <a:endParaRPr lang="en-US" sz="2800" dirty="0"/>
           </a:p>
         </p:txBody>
@@ -15465,8 +15514,8 @@
         </p:nvSpPr>
         <p:spPr>
           <a:xfrm>
-            <a:off x="338328" y="1307592"/>
-            <a:ext cx="1645920" cy="274320"/>
+            <a:off x="338328" y="941832"/>
+            <a:ext cx="1645920" cy="640080"/>
           </a:xfrm>
           <a:prstGeom prst="rect">
             <a:avLst/>
@@ -15504,8 +15553,8 @@
         </p:nvSpPr>
         <p:spPr>
           <a:xfrm>
-            <a:off x="338328" y="1581912"/>
-            <a:ext cx="1645920" cy="201168"/>
+            <a:off x="338328" y="1417320"/>
+            <a:ext cx="1645920" cy="365760"/>
           </a:xfrm>
           <a:prstGeom prst="rect">
             <a:avLst/>
@@ -16028,14 +16077,6 @@
             <a:pPr marL="0" indent="0" algn="ctr">
               <a:buNone/>
             </a:pPr>
-            <a:r>
-              <a:rPr lang="en-US" sz="2800" dirty="0">
-                <a:solidFill>
-                  <a:srgbClr val="000000"/>
-                </a:solidFill>
-              </a:rPr>
-              <a:t>👩‍💻</a:t>
-            </a:r>
             <a:endParaRPr lang="en-US" sz="2800" dirty="0"/>
           </a:p>
         </p:txBody>
@@ -16048,8 +16089,8 @@
         </p:nvSpPr>
         <p:spPr>
           <a:xfrm>
-            <a:off x="338328" y="2724912"/>
-            <a:ext cx="1645920" cy="274320"/>
+            <a:off x="338328" y="2359152"/>
+            <a:ext cx="1645920" cy="640080"/>
           </a:xfrm>
           <a:prstGeom prst="rect">
             <a:avLst/>
@@ -16087,8 +16128,8 @@
         </p:nvSpPr>
         <p:spPr>
           <a:xfrm>
-            <a:off x="338328" y="2999232"/>
-            <a:ext cx="1645920" cy="201168"/>
+            <a:off x="338328" y="2788920"/>
+            <a:ext cx="1645920" cy="411480"/>
           </a:xfrm>
           <a:prstGeom prst="rect">
             <a:avLst/>
@@ -16611,14 +16652,6 @@
             <a:pPr marL="0" indent="0" algn="ctr">
               <a:buNone/>
             </a:pPr>
-            <a:r>
-              <a:rPr lang="en-US" sz="2800" dirty="0">
-                <a:solidFill>
-                  <a:srgbClr val="000000"/>
-                </a:solidFill>
-              </a:rPr>
-              <a:t>🎨</a:t>
-            </a:r>
             <a:endParaRPr lang="en-US" sz="2800" dirty="0"/>
           </a:p>
         </p:txBody>
@@ -16631,8 +16664,8 @@
         </p:nvSpPr>
         <p:spPr>
           <a:xfrm>
-            <a:off x="338328" y="4142232"/>
-            <a:ext cx="1645920" cy="274320"/>
+            <a:off x="338328" y="3675888"/>
+            <a:ext cx="1645920" cy="740664"/>
           </a:xfrm>
           <a:prstGeom prst="rect">
             <a:avLst/>
@@ -16670,8 +16703,8 @@
         </p:nvSpPr>
         <p:spPr>
           <a:xfrm>
-            <a:off x="338328" y="4416552"/>
-            <a:ext cx="1645920" cy="201168"/>
+            <a:off x="338328" y="4201668"/>
+            <a:ext cx="1645920" cy="416052"/>
           </a:xfrm>
           <a:prstGeom prst="rect">
             <a:avLst/>
